--- a/docs/figs/figs.pptx
+++ b/docs/figs/figs.pptx
@@ -263,7 +263,7 @@
           <a:p>
             <a:fld id="{EECD6C48-156D-417D-8AFC-EA1FCF1FC2CB}" type="datetimeFigureOut">
               <a:rPr lang="en-CA" smtClean="0"/>
-              <a:t>2025-03-27</a:t>
+              <a:t>2025-04-17</a:t>
             </a:fld>
             <a:endParaRPr lang="en-CA"/>
           </a:p>
@@ -463,7 +463,7 @@
           <a:p>
             <a:fld id="{EECD6C48-156D-417D-8AFC-EA1FCF1FC2CB}" type="datetimeFigureOut">
               <a:rPr lang="en-CA" smtClean="0"/>
-              <a:t>2025-03-27</a:t>
+              <a:t>2025-04-17</a:t>
             </a:fld>
             <a:endParaRPr lang="en-CA"/>
           </a:p>
@@ -673,7 +673,7 @@
           <a:p>
             <a:fld id="{EECD6C48-156D-417D-8AFC-EA1FCF1FC2CB}" type="datetimeFigureOut">
               <a:rPr lang="en-CA" smtClean="0"/>
-              <a:t>2025-03-27</a:t>
+              <a:t>2025-04-17</a:t>
             </a:fld>
             <a:endParaRPr lang="en-CA"/>
           </a:p>
@@ -873,7 +873,7 @@
           <a:p>
             <a:fld id="{EECD6C48-156D-417D-8AFC-EA1FCF1FC2CB}" type="datetimeFigureOut">
               <a:rPr lang="en-CA" smtClean="0"/>
-              <a:t>2025-03-27</a:t>
+              <a:t>2025-04-17</a:t>
             </a:fld>
             <a:endParaRPr lang="en-CA"/>
           </a:p>
@@ -1149,7 +1149,7 @@
           <a:p>
             <a:fld id="{EECD6C48-156D-417D-8AFC-EA1FCF1FC2CB}" type="datetimeFigureOut">
               <a:rPr lang="en-CA" smtClean="0"/>
-              <a:t>2025-03-27</a:t>
+              <a:t>2025-04-17</a:t>
             </a:fld>
             <a:endParaRPr lang="en-CA"/>
           </a:p>
@@ -1417,7 +1417,7 @@
           <a:p>
             <a:fld id="{EECD6C48-156D-417D-8AFC-EA1FCF1FC2CB}" type="datetimeFigureOut">
               <a:rPr lang="en-CA" smtClean="0"/>
-              <a:t>2025-03-27</a:t>
+              <a:t>2025-04-17</a:t>
             </a:fld>
             <a:endParaRPr lang="en-CA"/>
           </a:p>
@@ -1832,7 +1832,7 @@
           <a:p>
             <a:fld id="{EECD6C48-156D-417D-8AFC-EA1FCF1FC2CB}" type="datetimeFigureOut">
               <a:rPr lang="en-CA" smtClean="0"/>
-              <a:t>2025-03-27</a:t>
+              <a:t>2025-04-17</a:t>
             </a:fld>
             <a:endParaRPr lang="en-CA"/>
           </a:p>
@@ -1974,7 +1974,7 @@
           <a:p>
             <a:fld id="{EECD6C48-156D-417D-8AFC-EA1FCF1FC2CB}" type="datetimeFigureOut">
               <a:rPr lang="en-CA" smtClean="0"/>
-              <a:t>2025-03-27</a:t>
+              <a:t>2025-04-17</a:t>
             </a:fld>
             <a:endParaRPr lang="en-CA"/>
           </a:p>
@@ -2087,7 +2087,7 @@
           <a:p>
             <a:fld id="{EECD6C48-156D-417D-8AFC-EA1FCF1FC2CB}" type="datetimeFigureOut">
               <a:rPr lang="en-CA" smtClean="0"/>
-              <a:t>2025-03-27</a:t>
+              <a:t>2025-04-17</a:t>
             </a:fld>
             <a:endParaRPr lang="en-CA"/>
           </a:p>
@@ -2400,7 +2400,7 @@
           <a:p>
             <a:fld id="{EECD6C48-156D-417D-8AFC-EA1FCF1FC2CB}" type="datetimeFigureOut">
               <a:rPr lang="en-CA" smtClean="0"/>
-              <a:t>2025-03-27</a:t>
+              <a:t>2025-04-17</a:t>
             </a:fld>
             <a:endParaRPr lang="en-CA"/>
           </a:p>
@@ -2689,7 +2689,7 @@
           <a:p>
             <a:fld id="{EECD6C48-156D-417D-8AFC-EA1FCF1FC2CB}" type="datetimeFigureOut">
               <a:rPr lang="en-CA" smtClean="0"/>
-              <a:t>2025-03-27</a:t>
+              <a:t>2025-04-17</a:t>
             </a:fld>
             <a:endParaRPr lang="en-CA"/>
           </a:p>
@@ -2932,7 +2932,7 @@
           <a:p>
             <a:fld id="{EECD6C48-156D-417D-8AFC-EA1FCF1FC2CB}" type="datetimeFigureOut">
               <a:rPr lang="en-CA" smtClean="0"/>
-              <a:t>2025-03-27</a:t>
+              <a:t>2025-04-17</a:t>
             </a:fld>
             <a:endParaRPr lang="en-CA"/>
           </a:p>
@@ -3376,7 +3376,7 @@
         </p:blipFill>
         <p:spPr bwMode="auto">
           <a:xfrm>
-            <a:off x="54241" y="335651"/>
+            <a:off x="2678614" y="335651"/>
             <a:ext cx="6834771" cy="6078400"/>
           </a:xfrm>
           <a:prstGeom prst="rect">
@@ -3396,59 +3396,7 @@
       </p:pic>
       <p:sp>
         <p:nvSpPr>
-          <p:cNvPr id="5" name="Rectangle 4">
-            <a:extLst>
-              <a:ext uri="{FF2B5EF4-FFF2-40B4-BE49-F238E27FC236}">
-                <a16:creationId xmlns:a16="http://schemas.microsoft.com/office/drawing/2014/main" id="{2B5DADBD-6930-B9E4-9DB8-9C32617A2C55}"/>
-              </a:ext>
-            </a:extLst>
-          </p:cNvPr>
-          <p:cNvSpPr/>
-          <p:nvPr/>
-        </p:nvSpPr>
-        <p:spPr>
-          <a:xfrm>
-            <a:off x="590190" y="2019300"/>
-            <a:ext cx="1248108" cy="2905126"/>
-          </a:xfrm>
-          <a:prstGeom prst="rect">
-            <a:avLst/>
-          </a:prstGeom>
-          <a:solidFill>
-            <a:srgbClr val="FFC000"/>
-          </a:solidFill>
-          <a:ln>
-            <a:noFill/>
-          </a:ln>
-        </p:spPr>
-        <p:style>
-          <a:lnRef idx="2">
-            <a:schemeClr val="accent1">
-              <a:shade val="15000"/>
-            </a:schemeClr>
-          </a:lnRef>
-          <a:fillRef idx="1">
-            <a:schemeClr val="accent1"/>
-          </a:fillRef>
-          <a:effectRef idx="0">
-            <a:schemeClr val="accent1"/>
-          </a:effectRef>
-          <a:fontRef idx="minor">
-            <a:schemeClr val="lt1"/>
-          </a:fontRef>
-        </p:style>
-        <p:txBody>
-          <a:bodyPr rtlCol="0" anchor="ctr"/>
-          <a:lstStyle/>
-          <a:p>
-            <a:pPr algn="ctr"/>
-            <a:endParaRPr lang="en-CA"/>
-          </a:p>
-        </p:txBody>
-      </p:sp>
-      <p:sp>
-        <p:nvSpPr>
-          <p:cNvPr id="6" name="Rectangle 5">
+          <p:cNvPr id="2" name="Rectangle 1">
             <a:extLst>
               <a:ext uri="{FF2B5EF4-FFF2-40B4-BE49-F238E27FC236}">
                 <a16:creationId xmlns:a16="http://schemas.microsoft.com/office/drawing/2014/main" id="{5E3560C5-88BE-0DAF-7E0B-23428FF7A8F3}"/>
@@ -3460,7 +3408,7 @@
         </p:nvSpPr>
         <p:spPr>
           <a:xfrm>
-            <a:off x="-13252" y="1787684"/>
+            <a:off x="2611121" y="1787684"/>
             <a:ext cx="2335674" cy="1769717"/>
           </a:xfrm>
           <a:prstGeom prst="rect">
@@ -3484,75 +3432,23 @@
                   </a:solidFill>
                   <a:prstDash val="solid"/>
                 </a:ln>
-                <a:pattFill prst="pct50">
-                  <a:fgClr>
-                    <a:schemeClr val="accent1"/>
-                  </a:fgClr>
-                  <a:bgClr>
-                    <a:schemeClr val="accent1">
-                      <a:lumMod val="20000"/>
-                      <a:lumOff val="80000"/>
-                    </a:schemeClr>
-                  </a:bgClr>
-                </a:pattFill>
+                <a:solidFill>
+                  <a:srgbClr val="FFC000"/>
+                </a:solidFill>
                 <a:effectLst>
                   <a:outerShdw dist="38100" dir="2640000" algn="bl" rotWithShape="0">
                     <a:schemeClr val="accent1"/>
                   </a:outerShdw>
                 </a:effectLst>
+                <a:latin typeface="Courier New" panose="02070309020205020404" pitchFamily="49" charset="0"/>
+                <a:ea typeface="Ebrima" panose="02000000000000000000" pitchFamily="2" charset="0"/>
+                <a:cs typeface="Courier New" panose="02070309020205020404" pitchFamily="49" charset="0"/>
               </a:rPr>
               <a:t>Py</a:t>
             </a:r>
           </a:p>
         </p:txBody>
       </p:sp>
-      <p:pic>
-        <p:nvPicPr>
-          <p:cNvPr id="9" name="Picture 12" descr="Python Logo PNG Transparent Background Images | pngteam.com">
-            <a:extLst>
-              <a:ext uri="{FF2B5EF4-FFF2-40B4-BE49-F238E27FC236}">
-                <a16:creationId xmlns:a16="http://schemas.microsoft.com/office/drawing/2014/main" id="{B0CECF5E-96EE-A097-D29F-413C55AC417F}"/>
-              </a:ext>
-            </a:extLst>
-          </p:cNvPr>
-          <p:cNvPicPr>
-            <a:picLocks noChangeAspect="1" noChangeArrowheads="1"/>
-          </p:cNvPicPr>
-          <p:nvPr/>
-        </p:nvPicPr>
-        <p:blipFill>
-          <a:blip r:embed="rId3">
-            <a:extLst>
-              <a:ext uri="{28A0092B-C50C-407E-A947-70E740481C1C}">
-                <a14:useLocalDpi xmlns:a14="http://schemas.microsoft.com/office/drawing/2010/main" val="0"/>
-              </a:ext>
-            </a:extLst>
-          </a:blip>
-          <a:srcRect/>
-          <a:stretch>
-            <a:fillRect/>
-          </a:stretch>
-        </p:blipFill>
-        <p:spPr bwMode="auto">
-          <a:xfrm>
-            <a:off x="330478" y="3270839"/>
-            <a:ext cx="1724414" cy="1724412"/>
-          </a:xfrm>
-          <a:prstGeom prst="rect">
-            <a:avLst/>
-          </a:prstGeom>
-          <a:noFill/>
-          <a:extLst>
-            <a:ext uri="{909E8E84-426E-40DD-AFC4-6F175D3DCCD1}">
-              <a14:hiddenFill xmlns:a14="http://schemas.microsoft.com/office/drawing/2010/main">
-                <a:solidFill>
-                  <a:srgbClr val="FFFFFF"/>
-                </a:solidFill>
-              </a14:hiddenFill>
-            </a:ext>
-          </a:extLst>
-        </p:spPr>
-      </p:pic>
     </p:spTree>
     <p:extLst>
       <p:ext uri="{BB962C8B-B14F-4D97-AF65-F5344CB8AC3E}">
